--- a/SynAPS-ProgramPlan_ODK.pptx
+++ b/SynAPS-ProgramPlan_ODK.pptx
@@ -273,7 +273,7 @@
           </c:val>
           <c:extLst>
             <c:ext xmlns:c16="http://schemas.microsoft.com/office/drawing/2014/chart" uri="{C3380CC4-5D6E-409C-BE32-E72D297353CC}">
-              <c16:uniqueId val="{00000000-EDE8-4328-977C-D200E391310E}"/>
+              <c16:uniqueId val="{00000000-6B79-4636-B1D8-8CEDE123B759}"/>
             </c:ext>
           </c:extLst>
         </c:ser>
@@ -393,13 +393,13 @@
               </a:defRPr>
             </a:pPr>
             <a:r>
-              <a:rPr lang="ru-RU" sz="1500" b="0" i="0" u="none" strike="noStrike">
+              <a:rPr sz="1500" b="0" i="0" u="none" strike="noStrike">
                 <a:solidFill>
                   <a:srgbClr val="FFFFFF"/>
                 </a:solidFill>
                 <a:latin typeface="+mn-lt"/>
               </a:rPr>
-              <a:t>1 560 задач PSPLIB: все планы приняты</a:t>
+              <a:t>1 560 задач PSPLIB: все планы приняты</a:t>
             </a:r>
           </a:p>
         </c:rich>
@@ -508,7 +508,7 @@
           </c:val>
           <c:extLst>
             <c:ext xmlns:c16="http://schemas.microsoft.com/office/drawing/2014/chart" uri="{C3380CC4-5D6E-409C-BE32-E72D297353CC}">
-              <c16:uniqueId val="{00000000-E3F2-4F05-8008-353F17D95B61}"/>
+              <c16:uniqueId val="{00000000-1FB2-41A7-8FB4-67B720529D02}"/>
             </c:ext>
           </c:extLst>
         </c:ser>
@@ -607,7 +607,7 @@
           </c:val>
           <c:extLst>
             <c:ext xmlns:c16="http://schemas.microsoft.com/office/drawing/2014/chart" uri="{C3380CC4-5D6E-409C-BE32-E72D297353CC}">
-              <c16:uniqueId val="{00000001-E3F2-4F05-8008-353F17D95B61}"/>
+              <c16:uniqueId val="{00000001-1FB2-41A7-8FB4-67B720529D02}"/>
             </c:ext>
           </c:extLst>
         </c:ser>
@@ -752,7 +752,7 @@
     </p:spTree>
     <p:extLst>
       <p:ext uri="{BB962C8B-B14F-4D97-AF65-F5344CB8AC3E}">
-        <p14:creationId xmlns:p14="http://schemas.microsoft.com/office/powerpoint/2010/main" val="3417984955"/>
+        <p14:creationId xmlns:p14="http://schemas.microsoft.com/office/powerpoint/2010/main" val="2235155856"/>
       </p:ext>
     </p:extLst>
   </p:cSld>
@@ -1246,7 +1246,7 @@
           <a:p>
             <a:r>
               <a:rPr lang="en-US" dirty="0"/>
-              <a:t>Каждая строка здесь формула, а параметры назовёте вы: ставку, цену дня сдвига вехи, стоимость стендо-часа. Базовую линию снимаем до старта и вписываем в договор, так эффект ИИ в промышленности и доказывают, об этом в 2026 году писали Deloitte и HiveMQ. А ретроспективный прогон на вашем прошлом квартале покажет эффект раньше, чем вы поменяете хоть один процесс.</a:t>
+              <a:t>Каждая строка здесь формула, а параметры назовёте вы: ставку, цену дня сдвига вехи, стоимость часа стенда. Базовую линию снимаем до старта и вписываем в договор. А ретроспективный прогон на вашем прошлом квартале покажет эффект раньше, чем вы поменяете хоть один процесс.</a:t>
             </a:r>
           </a:p>
         </p:txBody>
@@ -1768,7 +1768,7 @@
           <a:p>
             <a:r>
               <a:rPr lang="en-US" dirty="0"/>
-              <a:t>Резервный слайд, открываем по вопросу из зала. Про вердикт «допустимый» говорим спокойно: система не приукрашивает вердикт, и именно поэтому её словам можно верить. На большинство вопросов лучший ответ дадут ваши данные на пилоте.</a:t>
+              <a:t>Резервный слайд, открываем по вопросу из зала. Про вердикт «допустимый» говорим спокойно: система не приукрашивает вердикт, и именно поэтому её словам можно верить. На большинство вопросов лучший ответ дадут ваши данные на пилоте. Для технических вопросов: MPP читается через MPXJ и Java 17, при чтении в журнале печатается «Windows fatal exception: access violation», тесты от этого не падают. Программа на 20 тысяч работ не запускалась.</a:t>
             </a:r>
           </a:p>
         </p:txBody>
@@ -2029,7 +2029,7 @@
           <a:p>
             <a:r>
               <a:rPr lang="en-US" dirty="0"/>
-              <a:t>Это зеркало предыдущего слайда, строка в строку. Посмотрите на третью строку: если срок невыполним, система это доказывает и называет требования, которые нужно ослабить. С таким ответом уже можно идти к руководству программы.</a:t>
+              <a:t>Это зеркало предыдущего слайда, строка в строку. Посмотрите на третью строку: если срок невыполним, система это доказывает и называет требование, которое не сходится. С таким ответом уже можно идти к руководству программы.</a:t>
             </a:r>
           </a:p>
         </p:txBody>
@@ -2464,7 +2464,7 @@
           <a:p>
             <a:r>
               <a:rPr lang="en-US" dirty="0"/>
-              <a:t>Стенд в модели уже живёт своей жизнью: у него есть состояние и переналадка, а работа может пойти на стенд А или Б, и решатель выберет режим сам. Каждое такое правило заново проверяет независимый модуль. К пилоту добавим событие «испытание не прошло» с повтором, тот самый главный риск с прошлого слайда, а крупные программы возьмём следующим этапом. Какие стенды у вас сегодня загружены сильнее всего?</a:t>
+              <a:t>Стенд в модели уже живёт своей жизнью: у него есть состояние и переналадка, а работа может пойти на стенд А или Б, и точный решатель выберет режим. Каждое такое правило заново проверяет независимый модуль. К пилоту добавим событие «испытание не прошло» с повтором, тот самый главный риск с прошлого слайда. Какие стенды у вас сегодня загружены сильнее всего? Если спросят детали: режимы задаются в JSON программы, не у вехи и не у начатой работы; быстрый план на них отвечает «модель не поддерживается» и дат не публикует; режимы и переналадка одной работы вместе не задаются; пример со стендами А и Б — иллюстрация.</a:t>
             </a:r>
           </a:p>
         </p:txBody>
@@ -3650,8 +3650,8 @@
           <p:nvPr/>
         </p:nvGraphicFramePr>
         <p:xfrm>
-          <a:off x="731520" y="1737360"/>
-          <a:ext cx="5669280" cy="3657600"/>
+          <a:off x="731520" y="1691640"/>
+          <a:ext cx="5669280" cy="3429000"/>
         </p:xfrm>
         <a:graphic>
           <a:graphicData uri="http://schemas.openxmlformats.org/drawingml/2006/chart">
@@ -3667,8 +3667,8 @@
         </p:nvSpPr>
         <p:spPr>
           <a:xfrm>
-            <a:off x="1130060" y="5413248"/>
-            <a:ext cx="4859260" cy="548640"/>
+            <a:off x="777240" y="5230368"/>
+            <a:ext cx="5303520" cy="731520"/>
           </a:xfrm>
           <a:prstGeom prst="rect">
             <a:avLst/>
@@ -3684,7 +3684,7 @@
               <a:buNone/>
             </a:pPr>
             <a:r>
-              <a:rPr lang="en-US" sz="1150" dirty="0">
+              <a:rPr lang="en-US" sz="1050" dirty="0">
                 <a:solidFill>
                   <a:srgbClr val="BFCCD7"/>
                 </a:solidFill>
@@ -3692,9 +3692,9 @@
                 <a:ea typeface="Arial" pitchFamily="34" charset="-122"/>
                 <a:cs typeface="Arial" pitchFamily="34" charset="-120"/>
               </a:rPr>
-              <a:t>j30: 476 из 480 совпали с известным оптимумом, среднее отклонение 0,013 %. Доказано оптимумов: 98,3 %, 84,4 % и 43,2 %</a:t>
-            </a:r>
-            <a:endParaRPr lang="en-US" sz="1150" dirty="0"/>
+              <a:t>j30 — доказано 472 из 480 (98,3 %), у 476 длительность равна известному оптимуму, отклонение 0,013 %. j60 — доказано 405 из 480 (84,4 %). j120 — доказано 259 из 600 (43,2 %)</a:t>
+            </a:r>
+            <a:endParaRPr lang="en-US" sz="1050" dirty="0"/>
           </a:p>
         </p:txBody>
       </p:sp>
@@ -3902,7 +3902,7 @@
                 <a:ea typeface="Arial" pitchFamily="34" charset="-122"/>
                 <a:cs typeface="Arial" pitchFamily="34" charset="-120"/>
               </a:rPr>
-              <a:t>автотестов; повторный расчёт даёт тот же план до последней даты</a:t>
+              <a:t>автотестов на 07.10.2026; те же данные и настройки дают тот же план</a:t>
             </a:r>
             <a:endParaRPr lang="en-US" sz="1250" dirty="0"/>
           </a:p>
@@ -3968,7 +3968,7 @@
                 <a:ea typeface="Arial" pitchFamily="34" charset="-122"/>
                 <a:cs typeface="Arial" pitchFamily="34" charset="-120"/>
               </a:rPr>
-              <a:t>2 688</a:t>
+              <a:t>2 688</a:t>
             </a:r>
             <a:endParaRPr lang="en-US" sz="3000" dirty="0"/>
           </a:p>
@@ -4112,7 +4112,7 @@
                 <a:ea typeface="Arial" pitchFamily="34" charset="-122"/>
                 <a:cs typeface="Arial" pitchFamily="34" charset="-120"/>
               </a:rPr>
-              <a:t>ложных принятий из 150 намеренно подменённых планов</a:t>
+              <a:t>ложных принятий на 150 случайных подменах принятого плана в тестах</a:t>
             </a:r>
             <a:endParaRPr lang="en-US" sz="1250" dirty="0"/>
           </a:p>
@@ -4263,7 +4263,7 @@
                 <a:ea typeface="Arial" pitchFamily="34" charset="-122"/>
                 <a:cs typeface="Arial" pitchFamily="34" charset="-120"/>
               </a:rPr>
-              <a:t>Привычные системы остаются: SynAPS читает выгрузки MS Project и Primavera и возвращает проверенный план</a:t>
+              <a:t>SynAPS читает выгрузки MS Project и Primavera и возвращает проверенный план в MS Project XML</a:t>
             </a:r>
             <a:endParaRPr lang="en-US" sz="1500" dirty="0"/>
           </a:p>
@@ -6775,7 +6775,7 @@
                           <a:ea typeface="Arial" pitchFamily="34" charset="-122"/>
                           <a:cs typeface="Arial" pitchFamily="34" charset="-120"/>
                         </a:rPr>
-                        <a:t>Журнал решений, защищённый от правки</a:t>
+                        <a:t>Журнал решений с контролем правки</a:t>
                       </a:r>
                       <a:endParaRPr lang="en-US" sz="1350" dirty="0">
                         <a:latin typeface="Arial" charset="0"/>
@@ -7047,7 +7047,7 @@
                           <a:ea typeface="Arial" pitchFamily="34" charset="-122"/>
                           <a:cs typeface="Arial" pitchFamily="34" charset="-120"/>
                         </a:rPr>
-                        <a:t>защищён от правки</a:t>
+                        <a:t>хеш-цепочка и якорь</a:t>
                       </a:r>
                       <a:endParaRPr lang="en-US" sz="1350" dirty="0">
                         <a:latin typeface="Arial" charset="0"/>
@@ -8262,7 +8262,7 @@
                 <a:ea typeface="Arial" pitchFamily="34" charset="-122"/>
                 <a:cs typeface="Arial" pitchFamily="34" charset="-120"/>
               </a:rPr>
-              <a:t>текст строится из фактов проверенного плана</a:t>
+              <a:t>по умолчанию выключена; текст только из фактов плана</a:t>
             </a:r>
             <a:endParaRPr lang="en-US" sz="1200" dirty="0"/>
           </a:p>
@@ -8396,7 +8396,7 @@
                 <a:ea typeface="Arial" pitchFamily="34" charset="-122"/>
                 <a:cs typeface="Arial" pitchFamily="34" charset="-120"/>
               </a:rPr>
-              <a:t>Перепланирование по событиям испытаний</a:t>
+              <a:t>Модель повторного испытания</a:t>
             </a:r>
             <a:endParaRPr lang="en-US" sz="1350" dirty="0"/>
           </a:p>
@@ -8435,7 +8435,7 @@
                 <a:ea typeface="Arial" pitchFamily="34" charset="-122"/>
                 <a:cs typeface="Arial" pitchFamily="34" charset="-120"/>
               </a:rPr>
-              <a:t>отказ, доработка и повтор на том же экземпляре</a:t>
+              <a:t>отказ, доработка, повтор; пересчёт уже есть</a:t>
             </a:r>
             <a:endParaRPr lang="en-US" sz="1200" dirty="0"/>
           </a:p>
@@ -8569,7 +8569,7 @@
                 <a:ea typeface="Arial" pitchFamily="34" charset="-122"/>
                 <a:cs typeface="Arial" pitchFamily="34" charset="-120"/>
               </a:rPr>
-              <a:t>Нейросимволический контур</a:t>
+              <a:t>Решатель · проверка · объяснение</a:t>
             </a:r>
             <a:endParaRPr lang="en-US" sz="1400" dirty="0"/>
           </a:p>
@@ -8759,7 +8759,7 @@
                 <a:ea typeface="Arial" pitchFamily="34" charset="-122"/>
                 <a:cs typeface="Arial" pitchFamily="34" charset="-120"/>
               </a:rPr>
-              <a:t>Четыре рычага из карточки запроса. Формулу согласуем вместе, параметры даёт ОДК</a:t>
+              <a:t>Рублёвую цифру даст пилот: формулу согласуем вместе, ставки и цены даёт ОДК</a:t>
             </a:r>
             <a:endParaRPr lang="en-US" sz="1500" dirty="0"/>
           </a:p>
@@ -9068,7 +9068,7 @@
                 <a:ea typeface="Arial" pitchFamily="34" charset="-122"/>
                 <a:cs typeface="Arial" pitchFamily="34" charset="-120"/>
               </a:rPr>
-              <a:t>4 ОКР и 7 вариантов одним запуском меньше чем за минуту</a:t>
+              <a:t>показ из 4 ОКР и 7 вариантов собирается примерно за 33 секунды</a:t>
             </a:r>
             <a:endParaRPr lang="en-US" sz="1250" dirty="0"/>
           </a:p>
@@ -9260,7 +9260,7 @@
                 <a:ea typeface="Arial" pitchFamily="34" charset="-122"/>
                 <a:cs typeface="Arial" pitchFamily="34" charset="-120"/>
               </a:rPr>
-              <a:t>второй стенд снимает 50 рабочих дней просрочки вех</a:t>
+              <a:t>учебная программа: второй стенд снимает 50 рабочих дней просрочки вех</a:t>
             </a:r>
             <a:endParaRPr lang="en-US" sz="1250" dirty="0"/>
           </a:p>
@@ -9389,7 +9389,7 @@
                 <a:ea typeface="Arial" pitchFamily="34" charset="-122"/>
                 <a:cs typeface="Arial" pitchFamily="34" charset="-120"/>
               </a:rPr>
-              <a:t>снятые часы простоя и переналадки × цена часа стенда (оценка ОДК)</a:t>
+              <a:t>снятые часы простоя стендов × цена часа стенда (оценка ОДК)</a:t>
             </a:r>
             <a:endParaRPr lang="en-US" sz="1350" dirty="0"/>
           </a:p>
@@ -9452,7 +9452,7 @@
                 <a:ea typeface="Arial" pitchFamily="34" charset="-122"/>
                 <a:cs typeface="Arial" pitchFamily="34" charset="-120"/>
               </a:rPr>
-              <a:t>22 конфликта найдены в исходных планах ещё до расчёта</a:t>
+              <a:t>22 конфликта в учебных планах найдены ещё до расчёта</a:t>
             </a:r>
             <a:endParaRPr lang="en-US" sz="1250" dirty="0"/>
           </a:p>
@@ -9644,7 +9644,7 @@
                 <a:ea typeface="Arial" pitchFamily="34" charset="-122"/>
                 <a:cs typeface="Arial" pitchFamily="34" charset="-120"/>
               </a:rPr>
-              <a:t>причина у 100 % переносов, журнал решений защищён от правки</a:t>
+              <a:t>71 перенос в плане показа — 71 объяснение причины</a:t>
             </a:r>
             <a:endParaRPr lang="en-US" sz="1250" dirty="0"/>
           </a:p>
@@ -10178,7 +10178,7 @@
                 <a:ea typeface="Arial" pitchFamily="34" charset="-122"/>
                 <a:cs typeface="Arial" pitchFamily="34" charset="-120"/>
               </a:rPr>
-              <a:t>Договор, методика и базовая линия. Обезличивание у вас. Доработки под ваши испытания</a:t>
+              <a:t>Договор, методика и базовая линия. Обезличивание у вас. Настройка под ваши стенды и испытания</a:t>
             </a:r>
             <a:endParaRPr lang="en-US" sz="1250" dirty="0"/>
           </a:p>
@@ -11359,7 +11359,7 @@
                           <a:ea typeface="Arial" pitchFamily="34" charset="-122"/>
                           <a:cs typeface="Arial" pitchFamily="34" charset="-120"/>
                         </a:rPr>
-                        <a:t>100 %, ноль ложных принятий</a:t>
+                        <a:t>100 %, ноль ложных принятий</a:t>
                       </a:r>
                       <a:endParaRPr lang="en-US" sz="1300" dirty="0">
                         <a:latin typeface="Arial" charset="0"/>
@@ -11427,7 +11427,7 @@
                           <a:ea typeface="Arial" pitchFamily="34" charset="-122"/>
                           <a:cs typeface="Arial" pitchFamily="34" charset="-120"/>
                         </a:rPr>
-                        <a:t>0 ложных принятий из 150 подменённых планов</a:t>
+                        <a:t>0 ложных принятий на 150 подменах плана в тестах</a:t>
                       </a:r>
                       <a:endParaRPr lang="en-US" sz="1300" dirty="0">
                         <a:latin typeface="Arial" charset="0"/>
@@ -11638,7 +11638,7 @@
                           <a:ea typeface="Arial" pitchFamily="34" charset="-122"/>
                           <a:cs typeface="Arial" pitchFamily="34" charset="-120"/>
                         </a:rPr>
-                        <a:t>4 ОКР и 7 вариантов меньше чем за минуту</a:t>
+                        <a:t>показ ≈ 33 с; 2 688 работ: быстрый план за 34 с</a:t>
                       </a:r>
                       <a:endParaRPr lang="en-US" sz="1300" dirty="0">
                         <a:latin typeface="Arial" charset="0"/>
@@ -11781,7 +11781,7 @@
                           <a:ea typeface="Arial" pitchFamily="34" charset="-122"/>
                           <a:cs typeface="Arial" pitchFamily="34" charset="-120"/>
                         </a:rPr>
-                        <a:t>≤ 30 с, &lt; 10 % несвязанных сдвигов</a:t>
+                        <a:t>≤ 30 с, &lt; 10 % несвязанных сдвигов</a:t>
                       </a:r>
                       <a:endParaRPr lang="en-US" sz="1300" dirty="0">
                         <a:latin typeface="Arial" charset="0"/>
@@ -11849,7 +11849,7 @@
                           <a:ea typeface="Arial" pitchFamily="34" charset="-122"/>
                           <a:cs typeface="Arial" pitchFamily="34" charset="-120"/>
                         </a:rPr>
-                        <a:t>правка одной работы: все сдвиги связаны с ней</a:t>
+                        <a:t>96 работ, правка одной: 77 сдвигов, все связаны с ней</a:t>
                       </a:r>
                       <a:endParaRPr lang="en-US" sz="1300" dirty="0">
                         <a:latin typeface="Arial" charset="0"/>
@@ -11992,7 +11992,7 @@
                           <a:ea typeface="Arial" pitchFamily="34" charset="-122"/>
                           <a:cs typeface="Arial" pitchFamily="34" charset="-120"/>
                         </a:rPr>
-                        <a:t>≥ 90 %</a:t>
+                        <a:t>≥ 90 %</a:t>
                       </a:r>
                       <a:endParaRPr lang="en-US" sz="1300" dirty="0">
                         <a:latin typeface="Arial" charset="0"/>
@@ -12060,7 +12060,7 @@
                           <a:ea typeface="Arial" pitchFamily="34" charset="-122"/>
                           <a:cs typeface="Arial" pitchFamily="34" charset="-120"/>
                         </a:rPr>
-                        <a:t>22 конфликта в учебных планах найдены до расчёта</a:t>
+                        <a:t>22 конфликта найдены на учебной программе</a:t>
                       </a:r>
                       <a:endParaRPr lang="en-US" sz="1300" dirty="0">
                         <a:latin typeface="Arial" charset="0"/>
@@ -12414,7 +12414,7 @@
                           <a:ea typeface="Arial" pitchFamily="34" charset="-122"/>
                           <a:cs typeface="Arial" pitchFamily="34" charset="-120"/>
                         </a:rPr>
-                        <a:t>100 %; оценка эксперта ≥ 4 из 5</a:t>
+                        <a:t>100 %; оценка эксперта ≥ 4 из 5</a:t>
                       </a:r>
                       <a:endParaRPr lang="en-US" sz="1300" dirty="0">
                         <a:latin typeface="Arial" charset="0"/>
@@ -12482,7 +12482,7 @@
                           <a:ea typeface="Arial" pitchFamily="34" charset="-122"/>
                           <a:cs typeface="Arial" pitchFamily="34" charset="-120"/>
                         </a:rPr>
-                        <a:t>причина есть у каждого переноса в показе</a:t>
+                        <a:t>71 из 71 переноса плана показа с причиной</a:t>
                       </a:r>
                       <a:endParaRPr lang="en-US" sz="1300" dirty="0">
                         <a:latin typeface="Arial" charset="0"/>
@@ -13515,7 +13515,7 @@
                 <a:ea typeface="Arial" pitchFamily="34" charset="-122"/>
                 <a:cs typeface="Arial" pitchFamily="34" charset="-120"/>
               </a:rPr>
-              <a:t>Доступ по ролям и TLS, журнал решений, защищённый от правки</a:t>
+              <a:t>Доступ по ролям и TLS. Правку журнала выдаёт хеш-цепочка, подмену — внешний якорь</a:t>
             </a:r>
             <a:endParaRPr lang="en-US" sz="1200" dirty="0"/>
           </a:p>
@@ -13823,7 +13823,7 @@
                 <a:ea typeface="Arial" pitchFamily="34" charset="-122"/>
                 <a:cs typeface="Arial" pitchFamily="34" charset="-120"/>
               </a:rPr>
-              <a:t>Проверенный план возвращается в MS Project вместе с базовым планом</a:t>
+              <a:t>Проверенный план возвращается в MS Project XML вместе с базовым планом</a:t>
             </a:r>
             <a:endParaRPr lang="en-US" sz="1200" dirty="0"/>
           </a:p>
@@ -14384,7 +14384,7 @@
                 <a:ea typeface="Arial" pitchFamily="34" charset="-122"/>
                 <a:cs typeface="Arial" pitchFamily="34" charset="-120"/>
               </a:rPr>
-              <a:t>пакет по ГОСТ Р 58048 для комиссии</a:t>
+              <a:t>пакет по ГОСТ Р 58048 по итогам пилота</a:t>
             </a:r>
             <a:endParaRPr lang="en-US" sz="1150" dirty="0"/>
           </a:p>
@@ -15164,7 +15164,7 @@
                 <a:ea typeface="Arial" pitchFamily="34" charset="-122"/>
                 <a:cs typeface="Arial" pitchFamily="34" charset="-120"/>
               </a:rPr>
-              <a:t>Повторный расчёт даёт тот же план до последней даты</a:t>
+              <a:t>Те же данные и настройки — тот же план до последней даты</a:t>
             </a:r>
             <a:endParaRPr lang="en-US" sz="1400" dirty="0"/>
           </a:p>
@@ -16100,8 +16100,8 @@
         </p:nvSpPr>
         <p:spPr>
           <a:xfrm>
-            <a:off x="777240" y="2112264"/>
-            <a:ext cx="5029200" cy="777240"/>
+            <a:off x="777240" y="2075688"/>
+            <a:ext cx="5029200" cy="822960"/>
           </a:xfrm>
           <a:prstGeom prst="rect">
             <a:avLst/>
@@ -16117,7 +16117,7 @@
               <a:buNone/>
             </a:pPr>
             <a:r>
-              <a:rPr lang="en-US" sz="1300" dirty="0">
+              <a:rPr lang="en-US" sz="1200" dirty="0">
                 <a:solidFill>
                   <a:srgbClr val="BFCCD7"/>
                 </a:solidFill>
@@ -16127,7 +16127,7 @@
               </a:rPr>
               <a:t>План принят и прошёл три проверки. Доказать оптимум за 8 секунд решатель не успел, и система так и пишет</a:t>
             </a:r>
-            <a:endParaRPr lang="en-US" sz="1300" dirty="0"/>
+            <a:endParaRPr lang="en-US" sz="1200" dirty="0"/>
           </a:p>
         </p:txBody>
       </p:sp>
@@ -16205,8 +16205,8 @@
         </p:nvSpPr>
         <p:spPr>
           <a:xfrm>
-            <a:off x="6400800" y="2112264"/>
-            <a:ext cx="5029200" cy="777240"/>
+            <a:off x="6400800" y="2075688"/>
+            <a:ext cx="5029200" cy="822960"/>
           </a:xfrm>
           <a:prstGeom prst="rect">
             <a:avLst/>
@@ -16222,7 +16222,7 @@
               <a:buNone/>
             </a:pPr>
             <a:r>
-              <a:rPr lang="en-US" sz="1300" dirty="0">
+              <a:rPr lang="en-US" sz="1200" dirty="0">
                 <a:solidFill>
                   <a:srgbClr val="BFCCD7"/>
                 </a:solidFill>
@@ -16230,9 +16230,9 @@
                 <a:ea typeface="Arial" pitchFamily="34" charset="-122"/>
                 <a:cs typeface="Arial" pitchFamily="34" charset="-120"/>
               </a:rPr>
-              <a:t>Импорт MS Project, Primavera и Excel покрыт тестами. Ваш файл и выгрузку из 1С прочитаем на пилоте</a:t>
-            </a:r>
-            <a:endParaRPr lang="en-US" sz="1300" dirty="0"/>
+              <a:t>MS Project XML, Primavera и Excel покрыты тестами, MPP читаем через MPXJ. Ваш файл MS Project проверим на пилоте, 1С — через XML или Excel</a:t>
+            </a:r>
+            <a:endParaRPr lang="en-US" sz="1200" dirty="0"/>
           </a:p>
         </p:txBody>
       </p:sp>
@@ -16310,8 +16310,8 @@
         </p:nvSpPr>
         <p:spPr>
           <a:xfrm>
-            <a:off x="777240" y="3621024"/>
-            <a:ext cx="5029200" cy="777240"/>
+            <a:off x="777240" y="3584448"/>
+            <a:ext cx="5029200" cy="822960"/>
           </a:xfrm>
           <a:prstGeom prst="rect">
             <a:avLst/>
@@ -16327,7 +16327,7 @@
               <a:buNone/>
             </a:pPr>
             <a:r>
-              <a:rPr lang="en-US" sz="1300" dirty="0">
+              <a:rPr lang="en-US" sz="1200" dirty="0">
                 <a:solidFill>
                   <a:srgbClr val="BFCCD7"/>
                 </a:solidFill>
@@ -16335,9 +16335,9 @@
                 <a:ea typeface="Arial" pitchFamily="34" charset="-122"/>
                 <a:cs typeface="Arial" pitchFamily="34" charset="-120"/>
               </a:rPr>
-              <a:t>2 688 работ — точным решателем, 5 010 — быстрым. Крупные программы берём декомпозицией по ОКР</a:t>
-            </a:r>
-            <a:endParaRPr lang="en-US" sz="1300" dirty="0"/>
+              <a:t>2 688 работ в 64 ОКР — оба решателя. 5 010 — допустимый план за 117,8 с. 8 700 работ упираются в предел 120 с быстрого поиска, 10 020 не входят в модель ядра</a:t>
+            </a:r>
+            <a:endParaRPr lang="en-US" sz="1200" dirty="0"/>
           </a:p>
         </p:txBody>
       </p:sp>
@@ -16415,8 +16415,8 @@
         </p:nvSpPr>
         <p:spPr>
           <a:xfrm>
-            <a:off x="6400800" y="3621024"/>
-            <a:ext cx="5029200" cy="777240"/>
+            <a:off x="6400800" y="3584448"/>
+            <a:ext cx="5029200" cy="822960"/>
           </a:xfrm>
           <a:prstGeom prst="rect">
             <a:avLst/>
@@ -16432,7 +16432,7 @@
               <a:buNone/>
             </a:pPr>
             <a:r>
-              <a:rPr lang="en-US" sz="1300" dirty="0">
+              <a:rPr lang="en-US" sz="1200" dirty="0">
                 <a:solidFill>
                   <a:srgbClr val="BFCCD7"/>
                 </a:solidFill>
@@ -16442,7 +16442,7 @@
               </a:rPr>
               <a:t>Считаем по формуле с вашими ставками. Базовую линию снимаем до старта и фиксируем в договоре</a:t>
             </a:r>
-            <a:endParaRPr lang="en-US" sz="1300" dirty="0"/>
+            <a:endParaRPr lang="en-US" sz="1200" dirty="0"/>
           </a:p>
         </p:txBody>
       </p:sp>
@@ -16520,8 +16520,8 @@
         </p:nvSpPr>
         <p:spPr>
           <a:xfrm>
-            <a:off x="777240" y="5129784"/>
-            <a:ext cx="5029200" cy="777240"/>
+            <a:off x="777240" y="5093208"/>
+            <a:ext cx="5029200" cy="822960"/>
           </a:xfrm>
           <a:prstGeom prst="rect">
             <a:avLst/>
@@ -16537,7 +16537,7 @@
               <a:buNone/>
             </a:pPr>
             <a:r>
-              <a:rPr lang="en-US" sz="1300" dirty="0">
+              <a:rPr lang="en-US" sz="1200" dirty="0">
                 <a:solidFill>
                   <a:srgbClr val="BFCCD7"/>
                 </a:solidFill>
@@ -16545,9 +16545,9 @@
                 <a:ea typeface="Arial" pitchFamily="34" charset="-122"/>
                 <a:cs typeface="Arial" pitchFamily="34" charset="-120"/>
               </a:rPr>
-              <a:t>Да, уже в плане и в независимой проверке. Режимы «стенд А или Б» тоже, решатель выбирает сам</a:t>
-            </a:r>
-            <a:endParaRPr lang="en-US" sz="1300" dirty="0"/>
+              <a:t>Да: состояния стенда и интервал переналадки входят в план точного решателя и в независимую проверку</a:t>
+            </a:r>
+            <a:endParaRPr lang="en-US" sz="1200" dirty="0"/>
           </a:p>
         </p:txBody>
       </p:sp>
@@ -16625,8 +16625,8 @@
         </p:nvSpPr>
         <p:spPr>
           <a:xfrm>
-            <a:off x="6400800" y="5129784"/>
-            <a:ext cx="5029200" cy="777240"/>
+            <a:off x="6400800" y="5093208"/>
+            <a:ext cx="5029200" cy="822960"/>
           </a:xfrm>
           <a:prstGeom prst="rect">
             <a:avLst/>
@@ -16642,7 +16642,7 @@
               <a:buNone/>
             </a:pPr>
             <a:r>
-              <a:rPr lang="en-US" sz="1300" dirty="0">
+              <a:rPr lang="en-US" sz="1200" dirty="0">
                 <a:solidFill>
                   <a:srgbClr val="BFCCD7"/>
                 </a:solidFill>
@@ -16650,9 +16650,9 @@
                 <a:ea typeface="Arial" pitchFamily="34" charset="-122"/>
                 <a:cs typeface="Arial" pitchFamily="34" charset="-120"/>
               </a:rPr>
-              <a:t>Без всех трёх проверок план не выходит из системы. Ноль ложных принятий из 150 подменённых планов</a:t>
-            </a:r>
-            <a:endParaRPr lang="en-US" sz="1300" dirty="0"/>
+              <a:t>Без трёх проверок даты не выходят из системы. 150 подмен принятого плана в тестах — ни одного ложного принятия</a:t>
+            </a:r>
+            <a:endParaRPr lang="en-US" sz="1200" dirty="0"/>
           </a:p>
         </p:txBody>
       </p:sp>
@@ -17263,7 +17263,7 @@
                 <a:ea typeface="Arial" pitchFamily="34" charset="-122"/>
                 <a:cs typeface="Arial" pitchFamily="34" charset="-120"/>
               </a:rPr>
-              <a:t>1 560 эталонных задач: все планы приняты. Ни одного ложного принятия из 150 подменённых планов</a:t>
+              <a:t>PSPLIB j30, j60 и j120: 1 560 задач, все планы приняты. 150 подмен плана в тестах — ни одного ложного принятия</a:t>
             </a:r>
             <a:endParaRPr lang="en-US" sz="1500" dirty="0"/>
           </a:p>
@@ -18533,7 +18533,7 @@
       </p:sp>
       <p:sp>
         <p:nvSpPr>
-          <p:cNvPr id="28" name="Slide Number Placeholder 0"/>
+          <p:cNvPr id="29" name="Slide Number Placeholder 0"/>
           <p:cNvSpPr>
             <a:spLocks noGrp="1"/>
           </p:cNvSpPr>
@@ -19366,7 +19366,7 @@
                 <a:ea typeface="Arial" pitchFamily="34" charset="-122"/>
                 <a:cs typeface="Arial" pitchFamily="34" charset="-120"/>
               </a:rPr>
-              <a:t>Система доказывает невыполнимость и называет, что сдвинуть и насколько</a:t>
+              <a:t>Система доказывает невыполнимость и называет требование, которое не сходится</a:t>
             </a:r>
             <a:endParaRPr lang="en-US" sz="1400" dirty="0"/>
           </a:p>
@@ -19774,7 +19774,7 @@
                 <a:ea typeface="Arial" pitchFamily="34" charset="-122"/>
                 <a:cs typeface="Arial" pitchFamily="34" charset="-120"/>
               </a:rPr>
-              <a:t>Причина у каждого переноса и журнал решений, защищённый от правки</a:t>
+              <a:t>Причина у каждого переноса и журнал решений, где видна любая правка записи</a:t>
             </a:r>
             <a:endParaRPr lang="en-US" sz="1400" dirty="0"/>
           </a:p>
@@ -21202,7 +21202,7 @@
                 <a:ea typeface="Arial" pitchFamily="34" charset="-122"/>
                 <a:cs typeface="Arial" pitchFamily="34" charset="-120"/>
               </a:rPr>
-              <a:t>ИИ в SynAPS — точная оптимизация с доказательством и объяснение каждого решения. Языковая модель подключается по желанию и только пересказывает факты плана</a:t>
+              <a:t>ИИ в SynAPS — точная оптимизация CP-SAT: «оптимум» и «невыполнимо» только с доказательством, причина у каждого переноса принятого плана. Языковая модель по умолчанию выключена и план не меняет</a:t>
             </a:r>
             <a:endParaRPr lang="en-US" sz="1300" dirty="0"/>
           </a:p>
@@ -21314,7 +21314,7 @@
                 <a:ea typeface="Arial" pitchFamily="34" charset="-122"/>
                 <a:cs typeface="Arial" pitchFamily="34" charset="-120"/>
               </a:rPr>
-              <a:t>Второй стенд снимает 50 рабочих дней просрочки</a:t>
+              <a:t>Второй стенд снимает 50 дней просрочки вех</a:t>
             </a:r>
             <a:endParaRPr lang="en-US" sz="2800" dirty="0"/>
           </a:p>
@@ -21353,7 +21353,7 @@
                 <a:ea typeface="Arial" pitchFamily="34" charset="-122"/>
                 <a:cs typeface="Arial" pitchFamily="34" charset="-120"/>
               </a:rPr>
-              <a:t>4 ОКР на 4 площадках: КБ, опытный завод, испытательная станция, серийный завод. Данные учебные</a:t>
+              <a:t>4 ОКР на 4 площадках: КБ, опытный завод, испытательная станция, серийный завод. Данные учебные, имена выдуманы</a:t>
             </a:r>
             <a:endParaRPr lang="en-US" sz="1500" dirty="0"/>
           </a:p>
@@ -23682,8 +23682,8 @@
         </p:nvSpPr>
         <p:spPr>
           <a:xfrm>
-            <a:off x="1043796" y="4069080"/>
-            <a:ext cx="7185804" cy="228600"/>
+            <a:off x="1052422" y="4023360"/>
+            <a:ext cx="7177177" cy="329184"/>
           </a:xfrm>
           <a:prstGeom prst="rect">
             <a:avLst/>
@@ -23699,17 +23699,17 @@
               <a:buNone/>
             </a:pPr>
             <a:r>
-              <a:rPr lang="en-US" sz="1050" dirty="0">
-                <a:solidFill>
-                  <a:srgbClr val="8094A4"/>
-                </a:solidFill>
-                <a:latin typeface="Arial" pitchFamily="34" charset="0"/>
-                <a:ea typeface="Arial" pitchFamily="34" charset="-122"/>
-                <a:cs typeface="Arial" pitchFamily="34" charset="-120"/>
-              </a:rPr>
-              <a:t>Сравнение вариантов плана в отчёте системы</a:t>
-            </a:r>
-            <a:endParaRPr lang="en-US" sz="1050" dirty="0"/>
+              <a:rPr lang="en-US" sz="950" dirty="0">
+                <a:solidFill>
+                  <a:srgbClr val="BFCCD7"/>
+                </a:solidFill>
+                <a:latin typeface="Arial" pitchFamily="34" charset="0"/>
+                <a:ea typeface="Arial" pitchFamily="34" charset="-122"/>
+                <a:cs typeface="Arial" pitchFamily="34" charset="-120"/>
+              </a:rPr>
+              <a:t>«Допустим» — план принят, оптимум за 8 с не доказан. «Оптимум» — по цели своего варианта. «Что если» — на изменённой программе</a:t>
+            </a:r>
+            <a:endParaRPr lang="en-US" sz="950" dirty="0"/>
           </a:p>
         </p:txBody>
       </p:sp>
@@ -24865,7 +24865,7 @@
                 <a:ea typeface="Arial" pitchFamily="34" charset="-122"/>
                 <a:cs typeface="Arial" pitchFamily="34" charset="-120"/>
               </a:rPr>
-              <a:t>Стенд TESTER-2 16.05.2028 занят предварительными испытаниями ОКР-2</a:t>
+              <a:t>TESTER-2 занят 16.05.2028: «Предварительные испытания: работа 3» (ОКР-2)</a:t>
             </a:r>
             <a:endParaRPr lang="en-US" sz="1450" dirty="0"/>
           </a:p>
@@ -24894,21 +24894,21 @@
             <a:tbl>
               <a:tblPr/>
               <a:tblGrid>
-                <a:gridCol w="2514600">
+                <a:gridCol w="2148840">
                   <a:extLst>
                     <a:ext uri="{9D8B030D-6E8A-4147-A177-3AD203B41FA5}">
                       <a16:colId xmlns:a16="http://schemas.microsoft.com/office/drawing/2014/main" val="20000"/>
                     </a:ext>
                   </a:extLst>
                 </a:gridCol>
-                <a:gridCol w="685800">
+                <a:gridCol w="548640">
                   <a:extLst>
                     <a:ext uri="{9D8B030D-6E8A-4147-A177-3AD203B41FA5}">
                       <a16:colId xmlns:a16="http://schemas.microsoft.com/office/drawing/2014/main" val="20001"/>
                     </a:ext>
                   </a:extLst>
                 </a:gridCol>
-                <a:gridCol w="3017520">
+                <a:gridCol w="3520440">
                   <a:extLst>
                     <a:ext uri="{9D8B030D-6E8A-4147-A177-3AD203B41FA5}">
                       <a16:colId xmlns:a16="http://schemas.microsoft.com/office/drawing/2014/main" val="20002"/>
@@ -24926,7 +24926,7 @@
                         <a:buNone/>
                       </a:pPr>
                       <a:r>
-                        <a:rPr lang="en-US" sz="1150" b="1" dirty="0">
+                        <a:rPr lang="en-US" sz="1050" b="1" dirty="0">
                           <a:solidFill>
                             <a:srgbClr val="FFFFFF"/>
                           </a:solidFill>
@@ -24936,7 +24936,7 @@
                         </a:rPr>
                         <a:t>Работа</a:t>
                       </a:r>
-                      <a:endParaRPr lang="en-US" sz="1150" dirty="0">
+                      <a:endParaRPr lang="en-US" sz="1050" dirty="0">
                         <a:latin typeface="Arial" charset="0"/>
                         <a:ea typeface="Arial" charset="0"/>
                         <a:cs typeface="Arial" charset="0"/>
@@ -24994,7 +24994,7 @@
                         <a:buNone/>
                       </a:pPr>
                       <a:r>
-                        <a:rPr lang="en-US" sz="1150" b="1" dirty="0">
+                        <a:rPr lang="en-US" sz="1050" b="1" dirty="0">
                           <a:solidFill>
                             <a:srgbClr val="FFFFFF"/>
                           </a:solidFill>
@@ -25004,7 +25004,7 @@
                         </a:rPr>
                         <a:t>Сдвиг</a:t>
                       </a:r>
-                      <a:endParaRPr lang="en-US" sz="1150" dirty="0">
+                      <a:endParaRPr lang="en-US" sz="1050" dirty="0">
                         <a:latin typeface="Arial" charset="0"/>
                         <a:ea typeface="Arial" charset="0"/>
                         <a:cs typeface="Arial" charset="0"/>
@@ -25062,7 +25062,7 @@
                         <a:buNone/>
                       </a:pPr>
                       <a:r>
-                        <a:rPr lang="en-US" sz="1150" b="1" dirty="0">
+                        <a:rPr lang="en-US" sz="1050" b="1" dirty="0">
                           <a:solidFill>
                             <a:srgbClr val="FFFFFF"/>
                           </a:solidFill>
@@ -25072,7 +25072,7 @@
                         </a:rPr>
                         <a:t>Почему</a:t>
                       </a:r>
-                      <a:endParaRPr lang="en-US" sz="1150" dirty="0">
+                      <a:endParaRPr lang="en-US" sz="1050" dirty="0">
                         <a:latin typeface="Arial" charset="0"/>
                         <a:ea typeface="Arial" charset="0"/>
                         <a:cs typeface="Arial" charset="0"/>
@@ -25137,7 +25137,7 @@
                         <a:buNone/>
                       </a:pPr>
                       <a:r>
-                        <a:rPr lang="en-US" sz="1150" dirty="0">
+                        <a:rPr lang="en-US" sz="1050" dirty="0">
                           <a:solidFill>
                             <a:srgbClr val="BFCCD7"/>
                           </a:solidFill>
@@ -25147,7 +25147,7 @@
                         </a:rPr>
                         <a:t>Эскизный проект: работа 1</a:t>
                       </a:r>
-                      <a:endParaRPr lang="en-US" sz="1150" dirty="0">
+                      <a:endParaRPr lang="en-US" sz="1050" dirty="0">
                         <a:latin typeface="Arial" charset="0"/>
                         <a:ea typeface="Arial" charset="0"/>
                         <a:cs typeface="Arial" charset="0"/>
@@ -25205,7 +25205,7 @@
                         <a:buNone/>
                       </a:pPr>
                       <a:r>
-                        <a:rPr lang="en-US" sz="1150" b="1" dirty="0">
+                        <a:rPr lang="en-US" sz="1050" b="1" dirty="0">
                           <a:solidFill>
                             <a:srgbClr val="F08A3C"/>
                           </a:solidFill>
@@ -25215,7 +25215,7 @@
                         </a:rPr>
                         <a:t>+11</a:t>
                       </a:r>
-                      <a:endParaRPr lang="en-US" sz="1150" dirty="0">
+                      <a:endParaRPr lang="en-US" sz="1050" dirty="0">
                         <a:latin typeface="Arial" charset="0"/>
                         <a:ea typeface="Arial" charset="0"/>
                         <a:cs typeface="Arial" charset="0"/>
@@ -25273,7 +25273,7 @@
                         <a:buNone/>
                       </a:pPr>
                       <a:r>
-                        <a:rPr lang="en-US" sz="1150" dirty="0">
+                        <a:rPr lang="en-US" sz="1050" dirty="0">
                           <a:solidFill>
                             <a:srgbClr val="BFCCD7"/>
                           </a:solidFill>
@@ -25281,9 +25281,9 @@
                           <a:ea typeface="Arial" pitchFamily="34" charset="-122"/>
                           <a:cs typeface="Arial" pitchFamily="34" charset="-120"/>
                         </a:rPr>
-                        <a:t>SYSTEMS-2 занят 12.01.2027 работой ОКР-3</a:t>
+                        <a:t>SYSTEMS-2 занят 12.01.2027: «Эскизный проект: работа 2» (ОКР-3)</a:t>
                       </a:r>
-                      <a:endParaRPr lang="en-US" sz="1150" dirty="0">
+                      <a:endParaRPr lang="en-US" sz="1050" dirty="0">
                         <a:latin typeface="Arial" charset="0"/>
                         <a:ea typeface="Arial" charset="0"/>
                         <a:cs typeface="Arial" charset="0"/>
@@ -25348,7 +25348,7 @@
                         <a:buNone/>
                       </a:pPr>
                       <a:r>
-                        <a:rPr lang="en-US" sz="1150" dirty="0">
+                        <a:rPr lang="en-US" sz="1050" dirty="0">
                           <a:solidFill>
                             <a:srgbClr val="BFCCD7"/>
                           </a:solidFill>
@@ -25356,9 +25356,9 @@
                           <a:ea typeface="Arial" pitchFamily="34" charset="-122"/>
                           <a:cs typeface="Arial" pitchFamily="34" charset="-120"/>
                         </a:rPr>
-                        <a:t>Рабочая КД: работа 1</a:t>
+                        <a:t>Рабочая конструкторская документация: работа 1</a:t>
                       </a:r>
-                      <a:endParaRPr lang="en-US" sz="1150" dirty="0">
+                      <a:endParaRPr lang="en-US" sz="1050" dirty="0">
                         <a:latin typeface="Arial" charset="0"/>
                         <a:ea typeface="Arial" charset="0"/>
                         <a:cs typeface="Arial" charset="0"/>
@@ -25416,7 +25416,7 @@
                         <a:buNone/>
                       </a:pPr>
                       <a:r>
-                        <a:rPr lang="en-US" sz="1150" b="1" dirty="0">
+                        <a:rPr lang="en-US" sz="1050" b="1" dirty="0">
                           <a:solidFill>
                             <a:srgbClr val="F08A3C"/>
                           </a:solidFill>
@@ -25426,7 +25426,7 @@
                         </a:rPr>
                         <a:t>+22</a:t>
                       </a:r>
-                      <a:endParaRPr lang="en-US" sz="1150" dirty="0">
+                      <a:endParaRPr lang="en-US" sz="1050" dirty="0">
                         <a:latin typeface="Arial" charset="0"/>
                         <a:ea typeface="Arial" charset="0"/>
                         <a:cs typeface="Arial" charset="0"/>
@@ -25484,7 +25484,7 @@
                         <a:buNone/>
                       </a:pPr>
                       <a:r>
-                        <a:rPr lang="en-US" sz="1150" dirty="0">
+                        <a:rPr lang="en-US" sz="1050" dirty="0">
                           <a:solidFill>
                             <a:srgbClr val="BFCCD7"/>
                           </a:solidFill>
@@ -25492,9 +25492,9 @@
                           <a:ea typeface="Arial" pitchFamily="34" charset="-122"/>
                           <a:cs typeface="Arial" pitchFamily="34" charset="-120"/>
                         </a:rPr>
-                        <a:t>DESIGNER-1 занят 09.06.2027 работой ОКР-4</a:t>
+                        <a:t>DESIGNER-1 занят 09.06.2027: «Технический проект: работа 1» (ОКР-4)</a:t>
                       </a:r>
-                      <a:endParaRPr lang="en-US" sz="1150" dirty="0">
+                      <a:endParaRPr lang="en-US" sz="1050" dirty="0">
                         <a:latin typeface="Arial" charset="0"/>
                         <a:ea typeface="Arial" charset="0"/>
                         <a:cs typeface="Arial" charset="0"/>
@@ -25559,7 +25559,7 @@
                         <a:buNone/>
                       </a:pPr>
                       <a:r>
-                        <a:rPr lang="en-US" sz="1150" dirty="0">
+                        <a:rPr lang="en-US" sz="1050" dirty="0">
                           <a:solidFill>
                             <a:srgbClr val="BFCCD7"/>
                           </a:solidFill>
@@ -25569,7 +25569,7 @@
                         </a:rPr>
                         <a:t>Изготовление опытного образца: работа 1</a:t>
                       </a:r>
-                      <a:endParaRPr lang="en-US" sz="1150" dirty="0">
+                      <a:endParaRPr lang="en-US" sz="1050" dirty="0">
                         <a:latin typeface="Arial" charset="0"/>
                         <a:ea typeface="Arial" charset="0"/>
                         <a:cs typeface="Arial" charset="0"/>
@@ -25627,7 +25627,7 @@
                         <a:buNone/>
                       </a:pPr>
                       <a:r>
-                        <a:rPr lang="en-US" sz="1150" b="1" dirty="0">
+                        <a:rPr lang="en-US" sz="1050" b="1" dirty="0">
                           <a:solidFill>
                             <a:srgbClr val="F08A3C"/>
                           </a:solidFill>
@@ -25637,7 +25637,7 @@
                         </a:rPr>
                         <a:t>+6</a:t>
                       </a:r>
-                      <a:endParaRPr lang="en-US" sz="1150" dirty="0">
+                      <a:endParaRPr lang="en-US" sz="1050" dirty="0">
                         <a:latin typeface="Arial" charset="0"/>
                         <a:ea typeface="Arial" charset="0"/>
                         <a:cs typeface="Arial" charset="0"/>
@@ -25695,7 +25695,7 @@
                         <a:buNone/>
                       </a:pPr>
                       <a:r>
-                        <a:rPr lang="en-US" sz="1150" dirty="0">
+                        <a:rPr lang="en-US" sz="1050" dirty="0">
                           <a:solidFill>
                             <a:srgbClr val="BFCCD7"/>
                           </a:solidFill>
@@ -25703,9 +25703,9 @@
                           <a:ea typeface="Arial" pitchFamily="34" charset="-122"/>
                           <a:cs typeface="Arial" pitchFamily="34" charset="-120"/>
                         </a:rPr>
-                        <a:t>TECHNOLOGIST-2 занят 07.07.2027 работой ОКР-3</a:t>
+                        <a:t>TECHNOLOGIST-2 занят 06.07.2027: «Изготовление опытного образца: работа 3» (ОКР-3)</a:t>
                       </a:r>
-                      <a:endParaRPr lang="en-US" sz="1150" dirty="0">
+                      <a:endParaRPr lang="en-US" sz="1050" dirty="0">
                         <a:latin typeface="Arial" charset="0"/>
                         <a:ea typeface="Arial" charset="0"/>
                         <a:cs typeface="Arial" charset="0"/>
@@ -25772,8 +25772,8 @@
         </p:nvSpPr>
         <p:spPr>
           <a:xfrm>
-            <a:off x="1164566" y="5532120"/>
-            <a:ext cx="5556274" cy="274320"/>
+            <a:off x="1121434" y="5532120"/>
+            <a:ext cx="5599406" cy="274320"/>
           </a:xfrm>
           <a:prstGeom prst="rect">
             <a:avLst/>
@@ -25926,8 +25926,8 @@
         </p:nvSpPr>
         <p:spPr>
           <a:xfrm>
-            <a:off x="7680960" y="2697480"/>
-            <a:ext cx="3749040" cy="685800"/>
+            <a:off x="7680960" y="2651760"/>
+            <a:ext cx="3749040" cy="960120"/>
           </a:xfrm>
           <a:prstGeom prst="rect">
             <a:avLst/>
@@ -25943,7 +25943,7 @@
               <a:buNone/>
             </a:pPr>
             <a:r>
-              <a:rPr lang="en-US" sz="1700" b="1" dirty="0">
+              <a:rPr lang="en-US" sz="1500" b="1" dirty="0">
                 <a:solidFill>
                   <a:srgbClr val="FFFFFF"/>
                 </a:solidFill>
@@ -25951,9 +25951,9 @@
                 <a:ea typeface="Arial" pitchFamily="34" charset="-122"/>
                 <a:cs typeface="Arial" pitchFamily="34" charset="-120"/>
               </a:rPr>
-              <a:t>Пример с ужесточённым сроком: веха испытаний ОКР-4 к 14.12.2027</a:t>
-            </a:r>
-            <a:endParaRPr lang="en-US" sz="1700" dirty="0"/>
+              <a:t>Директивный срок вехи «Государственные и сертификационные испытания — завершение» ОКР-4: 14.12.2027</a:t>
+            </a:r>
+            <a:endParaRPr lang="en-US" sz="1500" dirty="0"/>
           </a:p>
         </p:txBody>
       </p:sp>
@@ -25965,8 +25965,8 @@
         </p:nvSpPr>
         <p:spPr>
           <a:xfrm>
-            <a:off x="7680960" y="3520440"/>
-            <a:ext cx="3749040" cy="2468880"/>
+            <a:off x="7680960" y="3749040"/>
+            <a:ext cx="3749040" cy="2194560"/>
           </a:xfrm>
           <a:prstGeom prst="rect">
             <a:avLst/>
@@ -25994,7 +25994,7 @@
                 <a:ea typeface="Arial" pitchFamily="34" charset="-122"/>
                 <a:cs typeface="Arial" pitchFamily="34" charset="-120"/>
               </a:rPr>
-              <a:t>Решатель доказывает: при этих связях и ресурсах дата недостижима</a:t>
+              <a:t>Решатель доказывает: при этих связях и ресурсах срок недостижим</a:t>
             </a:r>
             <a:endParaRPr lang="en-US" sz="1400" dirty="0"/>
           </a:p>
@@ -26015,7 +26015,7 @@
                 <a:ea typeface="Arial" pitchFamily="34" charset="-122"/>
                 <a:cs typeface="Arial" pitchFamily="34" charset="-120"/>
               </a:rPr>
-              <a:t>Система называет несовместимые требования и насколько их сдвинуть</a:t>
+              <a:t>Система называет требование, которое не сходится</a:t>
             </a:r>
             <a:endParaRPr lang="en-US" sz="1400" dirty="0"/>
           </a:p>
@@ -26568,7 +26568,7 @@
                 <a:ea typeface="Arial" pitchFamily="34" charset="-122"/>
                 <a:cs typeface="Arial" pitchFamily="34" charset="-120"/>
               </a:rPr>
-              <a:t>100 %</a:t>
+              <a:t>40 из 40</a:t>
             </a:r>
             <a:endParaRPr lang="en-US" sz="2200" dirty="0"/>
           </a:p>
@@ -26585,7 +26585,7 @@
                 <a:ea typeface="Arial" pitchFamily="34" charset="-122"/>
                 <a:cs typeface="Arial" pitchFamily="34" charset="-120"/>
               </a:rPr>
-              <a:t>выборок с соблюдёнными директивными сроками; 139 дней — просрочка по плановым срокам</a:t>
+              <a:t>выборок уложились в директивные сроки; 139 дней — просрочка плановых сроков</a:t>
             </a:r>
             <a:endParaRPr lang="en-US" sz="2200" dirty="0"/>
           </a:p>
@@ -26642,8 +26642,8 @@
         </p:nvSpPr>
         <p:spPr>
           <a:xfrm>
-            <a:off x="4297680" y="5074920"/>
-            <a:ext cx="7132320" cy="914400"/>
+            <a:off x="4710022" y="5074920"/>
+            <a:ext cx="6719977" cy="914400"/>
           </a:xfrm>
           <a:prstGeom prst="rect">
             <a:avLst/>
@@ -26667,7 +26667,7 @@
                 <a:ea typeface="Arial" pitchFamily="34" charset="-122"/>
                 <a:cs typeface="Arial" pitchFamily="34" charset="-120"/>
               </a:rPr>
-              <a:t>Без повторных испытаний после отказа P80 наступит на 40 рабочих дней раньше. Сюда и стоит направить резерв стендового времени</a:t>
+              <a:t>Без повторных испытаний после отказа P80 наступает на 40 рабочих дней раньше. Это квантили принятого плана: сразу видно, какой риск сильнее всего бьёт по сроку</a:t>
             </a:r>
             <a:endParaRPr lang="en-US" sz="1450" dirty="0"/>
           </a:p>
@@ -26818,7 +26818,7 @@
                 <a:ea typeface="Arial" pitchFamily="34" charset="-122"/>
                 <a:cs typeface="Arial" pitchFamily="34" charset="-120"/>
               </a:rPr>
-              <a:t>Четыре механизма уже работают под независимой проверкой. Повтор испытаний добавим к пилоту</a:t>
+              <a:t>Четыре механизма работают под независимой проверкой. Модель повторного испытания добавляем к пилоту</a:t>
             </a:r>
             <a:endParaRPr lang="en-US" sz="1500" dirty="0"/>
           </a:p>
@@ -27040,7 +27040,7 @@
                 <a:ea typeface="Arial" pitchFamily="34" charset="-122"/>
                 <a:cs typeface="Arial" pitchFamily="34" charset="-120"/>
               </a:rPr>
-              <a:t>«Стенд А за 5 дней или стенд Б за 8»: решатель выбирает один режим</a:t>
+              <a:t>Например, «стенд А за 5 дней или стенд Б за 8»: точный решатель выбирает один режим</a:t>
             </a:r>
             <a:endParaRPr lang="en-US" sz="1250" dirty="0"/>
           </a:p>
@@ -27262,7 +27262,7 @@
                 <a:ea typeface="Arial" pitchFamily="34" charset="-122"/>
                 <a:cs typeface="Arial" pitchFamily="34" charset="-120"/>
               </a:rPr>
-              <a:t>Состояние стенда и интервал переналадки между конфигурациями заложены в сам план</a:t>
+              <a:t>Интервал переналадки между состояниями стенда стоит в плане и не прибавляется к работе</a:t>
             </a:r>
             <a:endParaRPr lang="en-US" sz="1250" dirty="0"/>
           </a:p>
@@ -27706,7 +27706,7 @@
                 <a:ea typeface="Arial" pitchFamily="34" charset="-122"/>
                 <a:cs typeface="Arial" pitchFamily="34" charset="-120"/>
               </a:rPr>
-              <a:t>Сравнение двух выгрузок: что изменилось в работах, связях, ресурсах и датах</a:t>
+              <a:t>Команда сравнения двух версий: что изменилось в работах, связях, ресурсах и датах</a:t>
             </a:r>
             <a:endParaRPr lang="en-US" sz="1250" dirty="0"/>
           </a:p>
@@ -27928,7 +27928,7 @@
                 <a:ea typeface="Arial" pitchFamily="34" charset="-122"/>
                 <a:cs typeface="Arial" pitchFamily="34" charset="-120"/>
               </a:rPr>
-              <a:t>Отказ, доработка и повтор на том же экземпляре, пересчёт с минимумом перестановок</a:t>
+              <a:t>Отказ, доработка и повтор на том же экземпляре. Пересчёт с минимумом перестановок уже есть</a:t>
             </a:r>
             <a:endParaRPr lang="en-US" sz="1250" dirty="0"/>
           </a:p>
@@ -28150,7 +28150,7 @@
                 <a:ea typeface="Arial" pitchFamily="34" charset="-122"/>
                 <a:cs typeface="Arial" pitchFamily="34" charset="-120"/>
               </a:rPr>
-              <a:t>Выгрузка из 1С в MS Project XML или Excel по формату, согласованному с ОДК</a:t>
+              <a:t>Через выгрузку заказчика в MS Project XML или Excel по согласованному формату</a:t>
             </a:r>
             <a:endParaRPr lang="en-US" sz="1250" dirty="0"/>
           </a:p>
